--- a/high-fidelity-prototype/AutoBid_Presentation revised 2.pptx
+++ b/high-fidelity-prototype/AutoBid_Presentation revised 2.pptx
@@ -5952,7 +5952,7 @@
         <p:spPr/>
         <p:txBody>
           <a:bodyPr>
-            <a:normAutofit fontScale="85000" lnSpcReduction="10000"/>
+            <a:normAutofit fontScale="92500" lnSpcReduction="20000"/>
           </a:bodyPr>
           <a:lstStyle/>
           <a:p>
@@ -5980,12 +5980,6 @@
             <a:r>
               <a:rPr lang="en-US" b="1" dirty="0"/>
               <a:t>• View providers list </a:t>
-            </a:r>
-          </a:p>
-          <a:p>
-            <a:r>
-              <a:rPr lang="en-US" b="1" dirty="0"/>
-              <a:t>• View users list</a:t>
             </a:r>
             <a:br>
               <a:rPr lang="en-US" dirty="0"/>
@@ -6749,14 +6743,6 @@
 </file>
 
 <file path=customXml/item1.xml><?xml version="1.0" encoding="utf-8"?>
-<p:properties xmlns:p="http://schemas.microsoft.com/office/2006/metadata/properties" xmlns:xsi="http://www.w3.org/2001/XMLSchema-instance" xmlns:pc="http://schemas.microsoft.com/office/infopath/2007/PartnerControls">
-  <documentManagement>
-    <_activity xmlns="c4e6298b-04fa-4dc8-868c-f77e0db41fc7" xsi:nil="true"/>
-  </documentManagement>
-</p:properties>
-</file>
-
-<file path=customXml/item2.xml><?xml version="1.0" encoding="utf-8"?>
 <ct:contentTypeSchema xmlns:ct="http://schemas.microsoft.com/office/2006/metadata/contentType" xmlns:ma="http://schemas.microsoft.com/office/2006/metadata/properties/metaAttributes" ct:_="" ma:_="" ma:contentTypeName="Document" ma:contentTypeID="0x0101007240A2BFB4C41D4F8A55538012C07922" ma:contentTypeVersion="6" ma:contentTypeDescription="Create a new document." ma:contentTypeScope="" ma:versionID="212d03dd1a8ebf47e8fc90e9ca682e19">
   <xsd:schema xmlns:xsd="http://www.w3.org/2001/XMLSchema" xmlns:xs="http://www.w3.org/2001/XMLSchema" xmlns:p="http://schemas.microsoft.com/office/2006/metadata/properties" xmlns:ns3="c4e6298b-04fa-4dc8-868c-f77e0db41fc7" targetNamespace="http://schemas.microsoft.com/office/2006/metadata/properties" ma:root="true" ma:fieldsID="8b9c43e624471aecf83ec70614c6cefc" ns3:_="">
     <xsd:import namespace="c4e6298b-04fa-4dc8-868c-f77e0db41fc7"/>
@@ -6912,6 +6898,14 @@
 </ct:contentTypeSchema>
 </file>
 
+<file path=customXml/item2.xml><?xml version="1.0" encoding="utf-8"?>
+<p:properties xmlns:p="http://schemas.microsoft.com/office/2006/metadata/properties" xmlns:xsi="http://www.w3.org/2001/XMLSchema-instance" xmlns:pc="http://schemas.microsoft.com/office/infopath/2007/PartnerControls">
+  <documentManagement>
+    <_activity xmlns="c4e6298b-04fa-4dc8-868c-f77e0db41fc7" xsi:nil="true"/>
+  </documentManagement>
+</p:properties>
+</file>
+
 <file path=customXml/item3.xml><?xml version="1.0" encoding="utf-8"?>
 <?mso-contentType ?>
 <FormTemplates xmlns="http://schemas.microsoft.com/sharepoint/v3/contenttype/forms">
@@ -6922,22 +6916,6 @@
 </file>
 
 <file path=customXml/itemProps1.xml><?xml version="1.0" encoding="utf-8"?>
-<ds:datastoreItem xmlns:ds="http://schemas.openxmlformats.org/officeDocument/2006/customXml" ds:itemID="{759466E5-A0A9-4B1C-8990-A2A79B0B23AF}">
-  <ds:schemaRefs>
-    <ds:schemaRef ds:uri="http://purl.org/dc/dcmitype/"/>
-    <ds:schemaRef ds:uri="http://schemas.microsoft.com/office/2006/documentManagement/types"/>
-    <ds:schemaRef ds:uri="http://purl.org/dc/terms/"/>
-    <ds:schemaRef ds:uri="http://purl.org/dc/elements/1.1/"/>
-    <ds:schemaRef ds:uri="c4e6298b-04fa-4dc8-868c-f77e0db41fc7"/>
-    <ds:schemaRef ds:uri="http://www.w3.org/XML/1998/namespace"/>
-    <ds:schemaRef ds:uri="http://schemas.microsoft.com/office/infopath/2007/PartnerControls"/>
-    <ds:schemaRef ds:uri="http://schemas.openxmlformats.org/package/2006/metadata/core-properties"/>
-    <ds:schemaRef ds:uri="http://schemas.microsoft.com/office/2006/metadata/properties"/>
-  </ds:schemaRefs>
-</ds:datastoreItem>
-</file>
-
-<file path=customXml/itemProps2.xml><?xml version="1.0" encoding="utf-8"?>
 <ds:datastoreItem xmlns:ds="http://schemas.openxmlformats.org/officeDocument/2006/customXml" ds:itemID="{9B961A59-F0F3-4460-B83D-DE0242A233FC}">
   <ds:schemaRefs>
     <ds:schemaRef ds:uri="http://schemas.microsoft.com/office/2006/metadata/contentType"/>
@@ -6955,6 +6933,22 @@
 </ds:datastoreItem>
 </file>
 
+<file path=customXml/itemProps2.xml><?xml version="1.0" encoding="utf-8"?>
+<ds:datastoreItem xmlns:ds="http://schemas.openxmlformats.org/officeDocument/2006/customXml" ds:itemID="{759466E5-A0A9-4B1C-8990-A2A79B0B23AF}">
+  <ds:schemaRefs>
+    <ds:schemaRef ds:uri="http://purl.org/dc/dcmitype/"/>
+    <ds:schemaRef ds:uri="http://schemas.microsoft.com/office/2006/documentManagement/types"/>
+    <ds:schemaRef ds:uri="http://purl.org/dc/terms/"/>
+    <ds:schemaRef ds:uri="http://purl.org/dc/elements/1.1/"/>
+    <ds:schemaRef ds:uri="c4e6298b-04fa-4dc8-868c-f77e0db41fc7"/>
+    <ds:schemaRef ds:uri="http://www.w3.org/XML/1998/namespace"/>
+    <ds:schemaRef ds:uri="http://schemas.microsoft.com/office/infopath/2007/PartnerControls"/>
+    <ds:schemaRef ds:uri="http://schemas.openxmlformats.org/package/2006/metadata/core-properties"/>
+    <ds:schemaRef ds:uri="http://schemas.microsoft.com/office/2006/metadata/properties"/>
+  </ds:schemaRefs>
+</ds:datastoreItem>
+</file>
+
 <file path=customXml/itemProps3.xml><?xml version="1.0" encoding="utf-8"?>
 <ds:datastoreItem xmlns:ds="http://schemas.openxmlformats.org/officeDocument/2006/customXml" ds:itemID="{01B78573-7C15-4354-900D-4630110EBCA9}">
   <ds:schemaRefs>
